--- a/youtube_ranking_20260601.pptx
+++ b/youtube_ranking_20260601.pptx
@@ -3597,7 +3597,7 @@
                 </a:solidFill>
                 <a:latin typeface="Arial"/>
               </a:rPr>
-              <a:t>⏱ 1:19  ·  📅 公開9時間前</a:t>
+              <a:t>⏱ 1:19  ·  📅 公開12時間前</a:t>
             </a:r>
           </a:p>
         </p:txBody>
@@ -3632,7 +3632,7 @@
                 </a:solidFill>
                 <a:latin typeface="Arial"/>
               </a:rPr>
-              <a:t>💡 公開9時間で急上昇入り！　急上昇中の新興コンテンツ</a:t>
+              <a:t>💡 公開12時間で急上昇入り！　急上昇中の新興コンテンツ</a:t>
             </a:r>
           </a:p>
         </p:txBody>
@@ -3957,7 +3957,7 @@
                 </a:solidFill>
                 <a:latin typeface="Arial"/>
               </a:rPr>
-              <a:t>👁 2,975,448  👍 220,874  💬 38,619  ⏱ 3:08  📅 公開1時間前</a:t>
+              <a:t>👁 2,975,448  👍 220,874  💬 38,619  ⏱ 3:08  📅 公開4時間前</a:t>
             </a:r>
           </a:p>
         </p:txBody>
@@ -3992,7 +3992,7 @@
                 </a:solidFill>
                 <a:latin typeface="Arial"/>
               </a:rPr>
-              <a:t>💡 公開1時間で急上昇入り！　100万再生超の大ヒット　いいね率7.4%と視聴者の支持が非常に高い</a:t>
+              <a:t>💡 公開4時間で急上昇入り！　100万再生超の大ヒット　いいね率7.4%と視聴者の支持が非常に高い</a:t>
             </a:r>
           </a:p>
         </p:txBody>
@@ -9435,7 +9435,7 @@
                 </a:solidFill>
                 <a:latin typeface="Arial"/>
               </a:rPr>
-              <a:t>⏱ 3:20  ·  📅 公開1時間前</a:t>
+              <a:t>⏱ 3:20  ·  📅 公開3時間前</a:t>
             </a:r>
           </a:p>
         </p:txBody>
@@ -9470,7 +9470,7 @@
                 </a:solidFill>
                 <a:latin typeface="Arial"/>
               </a:rPr>
-              <a:t>💡 公開1時間で急上昇入り！　50万再生の注目コンテンツ　コメント1000件超と議論が活発</a:t>
+              <a:t>💡 公開3時間で急上昇入り！　50万再生の注目コンテンツ　コメント1000件超と議論が活発</a:t>
             </a:r>
           </a:p>
         </p:txBody>
@@ -9814,7 +9814,7 @@
                 </a:solidFill>
                 <a:latin typeface="Arial"/>
               </a:rPr>
-              <a:t>⏱ 41:56  ·  📅 公開1時間前</a:t>
+              <a:t>⏱ 41:56  ·  📅 公開4時間前</a:t>
             </a:r>
           </a:p>
         </p:txBody>
@@ -9849,7 +9849,7 @@
                 </a:solidFill>
                 <a:latin typeface="Arial"/>
               </a:rPr>
-              <a:t>💡 公開1時間で急上昇入り！　10万再生突破の話題作　いいね率3.6%と好評価</a:t>
+              <a:t>💡 公開4時間で急上昇入り！　10万再生突破の話題作　いいね率3.6%と好評価</a:t>
             </a:r>
           </a:p>
         </p:txBody>
@@ -10193,7 +10193,7 @@
                 </a:solidFill>
                 <a:latin typeface="Arial"/>
               </a:rPr>
-              <a:t>⏱ 2:58  ·  📅 公開24時間前</a:t>
+              <a:t>⏱ 2:58  ·  📅 公開27時間前</a:t>
             </a:r>
           </a:p>
         </p:txBody>
@@ -10228,7 +10228,7 @@
                 </a:solidFill>
                 <a:latin typeface="Arial"/>
               </a:rPr>
-              <a:t>💡 公開24時間で急上昇入り！　急上昇中の新興コンテンツ</a:t>
+              <a:t>💡 公開1日で急上昇　急上昇中の新興コンテンツ</a:t>
             </a:r>
           </a:p>
         </p:txBody>
@@ -10572,7 +10572,7 @@
                 </a:solidFill>
                 <a:latin typeface="Arial"/>
               </a:rPr>
-              <a:t>⏱ 4:29:19  ·  📅 公開-5時間前</a:t>
+              <a:t>⏱ 4:29:19  ·  📅 公開-2時間前</a:t>
             </a:r>
           </a:p>
         </p:txBody>
@@ -10607,7 +10607,7 @@
                 </a:solidFill>
                 <a:latin typeface="Arial"/>
               </a:rPr>
-              <a:t>💡 公開-5時間で急上昇入り！　10万再生突破の話題作　いいね率3.3%と好評価</a:t>
+              <a:t>💡 公開-2時間で急上昇入り！　10万再生突破の話題作　いいね率3.3%と好評価</a:t>
             </a:r>
           </a:p>
         </p:txBody>
@@ -10951,7 +10951,7 @@
                 </a:solidFill>
                 <a:latin typeface="Arial"/>
               </a:rPr>
-              <a:t>⏱ 3:23  ·  📅 公開1時間前</a:t>
+              <a:t>⏱ 3:23  ·  📅 公開4時間前</a:t>
             </a:r>
           </a:p>
         </p:txBody>
@@ -10986,7 +10986,7 @@
                 </a:solidFill>
                 <a:latin typeface="Arial"/>
               </a:rPr>
-              <a:t>💡 公開1時間で急上昇入り！　10万再生突破の話題作　いいね率17.6%と視聴者の支持が非常に高い</a:t>
+              <a:t>💡 公開4時間で急上昇入り！　10万再生突破の話題作　いいね率17.6%と視聴者の支持が非常に高い</a:t>
             </a:r>
           </a:p>
         </p:txBody>
@@ -11330,7 +11330,7 @@
                 </a:solidFill>
                 <a:latin typeface="Arial"/>
               </a:rPr>
-              <a:t>⏱ 1:51:54  ·  📅 公開3時間前</a:t>
+              <a:t>⏱ 1:51:54  ·  📅 公開6時間前</a:t>
             </a:r>
           </a:p>
         </p:txBody>
@@ -11365,7 +11365,7 @@
                 </a:solidFill>
                 <a:latin typeface="Arial"/>
               </a:rPr>
-              <a:t>💡 公開3時間で急上昇入り！　10万再生突破の話題作　いいね率2.2%と好評価</a:t>
+              <a:t>💡 公開6時間で急上昇入り！　10万再生突破の話題作　いいね率2.2%と好評価</a:t>
             </a:r>
           </a:p>
         </p:txBody>
@@ -11709,7 +11709,7 @@
                 </a:solidFill>
                 <a:latin typeface="Arial"/>
               </a:rPr>
-              <a:t>⏱ 5:45  ·  📅 公開1時間前</a:t>
+              <a:t>⏱ 5:45  ·  📅 公開4時間前</a:t>
             </a:r>
           </a:p>
         </p:txBody>
@@ -11744,7 +11744,7 @@
                 </a:solidFill>
                 <a:latin typeface="Arial"/>
               </a:rPr>
-              <a:t>💡 公開1時間で急上昇入り！　10万再生突破の話題作　いいね率9.9%と視聴者の支持が非常に高い</a:t>
+              <a:t>💡 公開4時間で急上昇入り！　10万再生突破の話題作　いいね率9.9%と視聴者の支持が非常に高い</a:t>
             </a:r>
           </a:p>
         </p:txBody>
@@ -12088,7 +12088,7 @@
                 </a:solidFill>
                 <a:latin typeface="Arial"/>
               </a:rPr>
-              <a:t>⏱ 1:43:10  ·  📅 公開0時間前</a:t>
+              <a:t>⏱ 1:43:10  ·  📅 公開1時間前</a:t>
             </a:r>
           </a:p>
         </p:txBody>
@@ -12123,7 +12123,7 @@
                 </a:solidFill>
                 <a:latin typeface="Arial"/>
               </a:rPr>
-              <a:t>💡 公開0時間で急上昇入り！　10万再生突破の話題作</a:t>
+              <a:t>💡 公開1時間で急上昇入り！　10万再生突破の話題作</a:t>
             </a:r>
           </a:p>
         </p:txBody>
